--- a/src/test/java/com/uc/ppt/file/template.pptx
+++ b/src/test/java/com/uc/ppt/file/template.pptx
@@ -5,13 +5,16 @@
     <p:sldMasterId id="2147483648" r:id="rId1"/>
   </p:sldMasterIdLst>
   <p:notesMasterIdLst>
-    <p:notesMasterId r:id="rId4"/>
+    <p:notesMasterId r:id="rId7"/>
   </p:notesMasterIdLst>
   <p:handoutMasterIdLst>
-    <p:handoutMasterId r:id="rId5"/>
+    <p:handoutMasterId r:id="rId8"/>
   </p:handoutMasterIdLst>
   <p:sldIdLst>
-    <p:sldId id="257" r:id="rId3"/>
+    <p:sldId id="258" r:id="rId3"/>
+    <p:sldId id="259" r:id="rId4"/>
+    <p:sldId id="260" r:id="rId5"/>
+    <p:sldId id="261" r:id="rId6"/>
   </p:sldIdLst>
   <p:sldSz cx="12192000" cy="6858000"/>
   <p:notesSz cx="6858000" cy="9144000"/>
@@ -3583,81 +3586,258 @@
         <p:nvPr/>
       </p:nvGrpSpPr>
       <p:grpSpPr/>
-      <p:graphicFrame>
-        <p:nvGraphicFramePr>
-          <p:cNvPr id="4" name="表格 3"/>
-          <p:cNvGraphicFramePr/>
-          <p:nvPr/>
-        </p:nvGraphicFramePr>
-        <p:xfrm>
-          <a:off x="635" y="-1270"/>
-          <a:ext cx="12190730" cy="6859905"/>
-        </p:xfrm>
-        <a:graphic>
-          <a:graphicData uri="http://schemas.openxmlformats.org/drawingml/2006/table">
-            <a:tbl>
-              <a:tblPr firstRow="1" bandRow="1">
-                <a:tableStyleId>{5C22544A-7EE6-4342-B048-85BDC9FD1C3A}</a:tableStyleId>
-              </a:tblPr>
-              <a:tblGrid>
-                <a:gridCol w="12190730"/>
-              </a:tblGrid>
-              <a:tr h="2286635">
-                <a:tc>
-                  <a:txBody>
-                    <a:bodyPr/>
-                    <a:p>
-                      <a:pPr>
-                        <a:buNone/>
-                      </a:pPr>
-                      <a:endParaRPr lang="zh-CN" altLang="en-US"/>
-                    </a:p>
-                  </a:txBody>
-                  <a:tcPr/>
-                </a:tc>
-              </a:tr>
-              <a:tr h="2286635">
-                <a:tc>
-                  <a:txBody>
-                    <a:bodyPr/>
-                    <a:p>
-                      <a:pPr>
-                        <a:buNone/>
-                      </a:pPr>
-                      <a:endParaRPr lang="zh-CN" altLang="en-US"/>
-                    </a:p>
-                  </a:txBody>
-                  <a:tcPr/>
-                </a:tc>
-              </a:tr>
-              <a:tr h="2286635">
-                <a:tc>
-                  <a:txBody>
-                    <a:bodyPr/>
-                    <a:p>
-                      <a:pPr>
-                        <a:buNone/>
-                      </a:pPr>
-                      <a:endParaRPr lang="zh-CN" altLang="en-US"/>
-                    </a:p>
-                  </a:txBody>
-                  <a:tcPr/>
-                </a:tc>
-              </a:tr>
-            </a:tbl>
-          </a:graphicData>
-        </a:graphic>
-      </p:graphicFrame>
-      <p:sp>
-        <p:nvSpPr>
-          <p:cNvPr id="5" name="文本框 4"/>
+      <p:sp>
+        <p:nvSpPr>
+          <p:cNvPr id="2" name="标题 1"/>
+          <p:cNvSpPr>
+            <a:spLocks noGrp="1"/>
+          </p:cNvSpPr>
+          <p:nvPr>
+            <p:ph type="ctrTitle"/>
+            <p:custDataLst>
+              <p:tags r:id="rId1"/>
+            </p:custDataLst>
+          </p:nvPr>
+        </p:nvSpPr>
+        <p:spPr>
+          <a:xfrm>
+            <a:off x="1078230" y="541020"/>
+            <a:ext cx="9799320" cy="1115060"/>
+          </a:xfrm>
+          <a:ln w="12700" cmpd="sng">
+            <a:solidFill>
+              <a:schemeClr val="accent1">
+                <a:shade val="50000"/>
+              </a:schemeClr>
+            </a:solidFill>
+            <a:prstDash val="solid"/>
+          </a:ln>
+        </p:spPr>
+        <p:txBody>
+          <a:bodyPr/>
+          <a:p>
+            <a:r>
+              <a:rPr lang="en-US" altLang="zh-CN"/>
+              <a:t>${title}</a:t>
+            </a:r>
+            <a:endParaRPr lang="en-US" altLang="zh-CN"/>
+          </a:p>
+        </p:txBody>
+      </p:sp>
+      <p:sp>
+        <p:nvSpPr>
+          <p:cNvPr id="3" name="副标题 2"/>
+          <p:cNvSpPr>
+            <a:spLocks noGrp="1"/>
+          </p:cNvSpPr>
+          <p:nvPr>
+            <p:ph type="subTitle" idx="1"/>
+            <p:custDataLst>
+              <p:tags r:id="rId2"/>
+            </p:custDataLst>
+          </p:nvPr>
+        </p:nvSpPr>
+        <p:spPr>
+          <a:xfrm>
+            <a:off x="9636760" y="4530725"/>
+            <a:ext cx="2326640" cy="727075"/>
+          </a:xfrm>
+          <a:ln w="12700" cmpd="sng">
+            <a:solidFill>
+              <a:schemeClr val="accent1">
+                <a:shade val="50000"/>
+              </a:schemeClr>
+            </a:solidFill>
+            <a:prstDash val="solid"/>
+          </a:ln>
+        </p:spPr>
+        <p:txBody>
+          <a:bodyPr/>
+          <a:p>
+            <a:pPr algn="r"/>
+            <a:r>
+              <a:rPr lang="en-US" altLang="zh-CN"/>
+              <a:t>${author}</a:t>
+            </a:r>
+            <a:endParaRPr lang="en-US" altLang="zh-CN"/>
+          </a:p>
+        </p:txBody>
+      </p:sp>
+    </p:spTree>
+  </p:cSld>
+  <p:clrMapOvr>
+    <a:masterClrMapping/>
+  </p:clrMapOvr>
+</p:sld>
+</file>
+
+<file path=ppt/slides/slide2.xml><?xml version="1.0" encoding="utf-8"?>
+<p:sld xmlns:a="http://schemas.openxmlformats.org/drawingml/2006/main" xmlns:r="http://schemas.openxmlformats.org/officeDocument/2006/relationships" xmlns:p="http://schemas.openxmlformats.org/presentationml/2006/main">
+  <p:cSld>
+    <p:spTree>
+      <p:nvGrpSpPr>
+        <p:cNvPr id="1" name=""/>
+        <p:cNvGrpSpPr/>
+        <p:nvPr/>
+      </p:nvGrpSpPr>
+      <p:grpSpPr/>
+      <p:sp>
+        <p:nvSpPr>
+          <p:cNvPr id="4" name="文本框 3"/>
           <p:cNvSpPr txBox="1"/>
           <p:nvPr/>
         </p:nvSpPr>
         <p:spPr>
           <a:xfrm>
-            <a:off x="635" y="635"/>
-            <a:ext cx="12190730" cy="2259965"/>
+            <a:off x="305435" y="481330"/>
+            <a:ext cx="2621280" cy="1444625"/>
+          </a:xfrm>
+          <a:prstGeom prst="rect">
+            <a:avLst/>
+          </a:prstGeom>
+          <a:noFill/>
+          <a:ln w="12700" cmpd="sng">
+            <a:solidFill>
+              <a:schemeClr val="accent1">
+                <a:shade val="50000"/>
+              </a:schemeClr>
+            </a:solidFill>
+            <a:prstDash val="solid"/>
+          </a:ln>
+        </p:spPr>
+        <p:txBody>
+          <a:bodyPr wrap="square" rtlCol="0">
+            <a:noAutofit/>
+          </a:bodyPr>
+          <a:p>
+            <a:r>
+              <a:rPr lang="en-US" altLang="zh-CN"/>
+              <a:t>${imgChart1}</a:t>
+            </a:r>
+            <a:endParaRPr lang="en-US" altLang="zh-CN"/>
+          </a:p>
+        </p:txBody>
+      </p:sp>
+      <p:sp>
+        <p:nvSpPr>
+          <p:cNvPr id="2" name="文本框 1"/>
+          <p:cNvSpPr txBox="1"/>
+          <p:nvPr/>
+        </p:nvSpPr>
+        <p:spPr>
+          <a:xfrm>
+            <a:off x="3489325" y="481330"/>
+            <a:ext cx="2291080" cy="1444625"/>
+          </a:xfrm>
+          <a:prstGeom prst="rect">
+            <a:avLst/>
+          </a:prstGeom>
+          <a:noFill/>
+          <a:ln w="12700" cmpd="sng">
+            <a:solidFill>
+              <a:schemeClr val="accent1">
+                <a:shade val="50000"/>
+              </a:schemeClr>
+            </a:solidFill>
+            <a:prstDash val="solid"/>
+          </a:ln>
+        </p:spPr>
+        <p:txBody>
+          <a:bodyPr wrap="square" rtlCol="0" anchor="t" anchorCtr="0">
+            <a:noAutofit/>
+          </a:bodyPr>
+          <a:p>
+            <a:r>
+              <a:rPr lang="en-US" altLang="zh-CN"/>
+              <a:t>${imgChart2}</a:t>
+            </a:r>
+            <a:endParaRPr lang="en-US" altLang="zh-CN"/>
+          </a:p>
+        </p:txBody>
+      </p:sp>
+    </p:spTree>
+  </p:cSld>
+  <p:clrMapOvr>
+    <a:masterClrMapping/>
+  </p:clrMapOvr>
+</p:sld>
+</file>
+
+<file path=ppt/slides/slide3.xml><?xml version="1.0" encoding="utf-8"?>
+<p:sld xmlns:a="http://schemas.openxmlformats.org/drawingml/2006/main" xmlns:r="http://schemas.openxmlformats.org/officeDocument/2006/relationships" xmlns:p="http://schemas.openxmlformats.org/presentationml/2006/main">
+  <p:cSld>
+    <p:spTree>
+      <p:nvGrpSpPr>
+        <p:cNvPr id="1" name=""/>
+        <p:cNvGrpSpPr/>
+        <p:nvPr/>
+      </p:nvGrpSpPr>
+      <p:grpSpPr/>
+      <p:sp>
+        <p:nvSpPr>
+          <p:cNvPr id="4" name="文本框 3"/>
+          <p:cNvSpPr txBox="1"/>
+          <p:nvPr/>
+        </p:nvSpPr>
+        <p:spPr>
+          <a:xfrm>
+            <a:off x="497205" y="579120"/>
+            <a:ext cx="11204575" cy="2262505"/>
+          </a:xfrm>
+          <a:prstGeom prst="rect">
+            <a:avLst/>
+          </a:prstGeom>
+          <a:noFill/>
+          <a:ln w="12700" cmpd="sng">
+            <a:solidFill>
+              <a:schemeClr val="accent1">
+                <a:shade val="50000"/>
+              </a:schemeClr>
+            </a:solidFill>
+            <a:prstDash val="solid"/>
+          </a:ln>
+        </p:spPr>
+        <p:txBody>
+          <a:bodyPr wrap="square" rtlCol="0">
+            <a:noAutofit/>
+          </a:bodyPr>
+          <a:p>
+            <a:r>
+              <a:rPr lang="en-US" altLang="zh-CN"/>
+              <a:t>${tableData}</a:t>
+            </a:r>
+            <a:endParaRPr lang="en-US" altLang="zh-CN"/>
+          </a:p>
+        </p:txBody>
+      </p:sp>
+    </p:spTree>
+  </p:cSld>
+  <p:clrMapOvr>
+    <a:masterClrMapping/>
+  </p:clrMapOvr>
+</p:sld>
+</file>
+
+<file path=ppt/slides/slide4.xml><?xml version="1.0" encoding="utf-8"?>
+<p:sld xmlns:a="http://schemas.openxmlformats.org/drawingml/2006/main" xmlns:r="http://schemas.openxmlformats.org/officeDocument/2006/relationships" xmlns:p="http://schemas.openxmlformats.org/presentationml/2006/main">
+  <p:cSld>
+    <p:spTree>
+      <p:nvGrpSpPr>
+        <p:cNvPr id="1" name=""/>
+        <p:cNvGrpSpPr/>
+        <p:nvPr/>
+      </p:nvGrpSpPr>
+      <p:grpSpPr/>
+      <p:sp>
+        <p:nvSpPr>
+          <p:cNvPr id="4" name="文本框 3"/>
+          <p:cNvSpPr txBox="1"/>
+          <p:nvPr/>
+        </p:nvSpPr>
+        <p:spPr>
+          <a:xfrm>
+            <a:off x="2567305" y="1288415"/>
+            <a:ext cx="4064000" cy="368300"/>
           </a:xfrm>
           <a:prstGeom prst="rect">
             <a:avLst/>
@@ -3665,118 +3845,13 @@
           <a:noFill/>
         </p:spPr>
         <p:txBody>
-          <a:bodyPr wrap="square" rtlCol="0" anchor="ctr" anchorCtr="0">
-            <a:noAutofit/>
+          <a:bodyPr wrap="square" rtlCol="0">
+            <a:spAutoFit/>
           </a:bodyPr>
           <a:p>
-            <a:pPr algn="ctr"/>
-            <a:r>
-              <a:rPr lang="en-US" altLang="zh-CN" sz="4000" u="sng">
-                <a:latin typeface="+mj-lt"/>
-                <a:ea typeface="+mj-lt"/>
-                <a:cs typeface="Helvetica Neue Regular" panose="02000503000000020004" charset="0"/>
-              </a:rPr>
-              <a:t>${title}-${author}-${date}</a:t>
-            </a:r>
-            <a:endParaRPr lang="en-US" altLang="zh-CN" sz="4000" u="sng">
-              <a:latin typeface="+mj-lt"/>
-              <a:ea typeface="+mj-lt"/>
-              <a:cs typeface="Helvetica Neue Regular" panose="02000503000000020004" charset="0"/>
-            </a:endParaRPr>
-          </a:p>
-        </p:txBody>
-      </p:sp>
-      <p:sp>
-        <p:nvSpPr>
-          <p:cNvPr id="6" name="文本框 5"/>
-          <p:cNvSpPr txBox="1"/>
-          <p:nvPr/>
-        </p:nvSpPr>
-        <p:spPr>
-          <a:xfrm>
-            <a:off x="635" y="2259965"/>
-            <a:ext cx="6071870" cy="2315210"/>
-          </a:xfrm>
-          <a:prstGeom prst="rect">
-            <a:avLst/>
-          </a:prstGeom>
-          <a:solidFill>
-            <a:schemeClr val="accent1"/>
-          </a:solidFill>
-        </p:spPr>
-        <p:txBody>
-          <a:bodyPr wrap="square" rtlCol="0">
-            <a:noAutofit/>
-          </a:bodyPr>
-          <a:p>
             <a:r>
               <a:rPr lang="en-US" altLang="zh-CN"/>
-              <a:t>${image1}</a:t>
-            </a:r>
-            <a:endParaRPr lang="en-US" altLang="zh-CN"/>
-          </a:p>
-        </p:txBody>
-      </p:sp>
-      <p:sp>
-        <p:nvSpPr>
-          <p:cNvPr id="7" name="文本框 6"/>
-          <p:cNvSpPr txBox="1"/>
-          <p:nvPr/>
-        </p:nvSpPr>
-        <p:spPr>
-          <a:xfrm>
-            <a:off x="6072505" y="2259965"/>
-            <a:ext cx="6097905" cy="2259965"/>
-          </a:xfrm>
-          <a:prstGeom prst="rect">
-            <a:avLst/>
-          </a:prstGeom>
-          <a:solidFill>
-            <a:schemeClr val="accent1"/>
-          </a:solidFill>
-        </p:spPr>
-        <p:txBody>
-          <a:bodyPr wrap="square" rtlCol="0">
-            <a:noAutofit/>
-          </a:bodyPr>
-          <a:p>
-            <a:r>
-              <a:rPr lang="en-US" altLang="zh-CN">
-                <a:effectLst/>
-              </a:rPr>
-              <a:t>${image2}</a:t>
-            </a:r>
-            <a:endParaRPr lang="en-US" altLang="zh-CN">
-              <a:effectLst/>
-            </a:endParaRPr>
-          </a:p>
-        </p:txBody>
-      </p:sp>
-      <p:sp>
-        <p:nvSpPr>
-          <p:cNvPr id="2" name="文本框 1"/>
-          <p:cNvSpPr txBox="1"/>
-          <p:nvPr/>
-        </p:nvSpPr>
-        <p:spPr>
-          <a:xfrm>
-            <a:off x="635" y="4575175"/>
-            <a:ext cx="12190730" cy="2259330"/>
-          </a:xfrm>
-          <a:prstGeom prst="rect">
-            <a:avLst/>
-          </a:prstGeom>
-          <a:noFill/>
-        </p:spPr>
-        <p:txBody>
-          <a:bodyPr wrap="square" rtlCol="0" anchor="ctr" anchorCtr="0">
-            <a:noAutofit/>
-          </a:bodyPr>
-          <a:p>
-            <a:pPr algn="ctr"/>
-            <a:r>
-              <a:rPr lang="en-US" altLang="zh-CN"/>
-              <a:t>${titleImage1}</a:t>
+              <a:t>${sankeyUserFlow}</a:t>
             </a:r>
             <a:endParaRPr lang="en-US" altLang="zh-CN"/>
           </a:p>
@@ -4559,6 +4634,32 @@
   <p:tag name="KSO_WM_TEMPLATE_MASTER_TYPE" val="0"/>
   <p:tag name="KSO_WM_TEMPLATE_COLOR_TYPE" val="1"/>
   <p:tag name="KSO_WM_UNIT_SHOW_EDIT_AREA_INDICATION" val="1"/>
+</p:tagLst>
+</file>
+
+<file path=ppt/tags/tag63.xml><?xml version="1.0" encoding="utf-8"?>
+<p:tagLst xmlns:p="http://schemas.openxmlformats.org/presentationml/2006/main">
+  <p:tag name="KSO_WM_UNIT_HIGHLIGHT" val="0"/>
+  <p:tag name="KSO_WM_UNIT_COMPATIBLE" val="0"/>
+  <p:tag name="KSO_WM_UNIT_DIAGRAM_ISNUMVISUAL" val="0"/>
+  <p:tag name="KSO_WM_UNIT_DIAGRAM_ISREFERUNIT" val="0"/>
+  <p:tag name="KSO_WM_UNIT_ID" val="_1**"/>
+  <p:tag name="KSO_WM_UNIT_LAYERLEVEL" val="1"/>
+  <p:tag name="KSO_WM_TAG_VERSION" val="1.0"/>
+  <p:tag name="KSO_WM_BEAUTIFY_FLAG" val="#wm#"/>
+</p:tagLst>
+</file>
+
+<file path=ppt/tags/tag64.xml><?xml version="1.0" encoding="utf-8"?>
+<p:tagLst xmlns:p="http://schemas.openxmlformats.org/presentationml/2006/main">
+  <p:tag name="KSO_WM_UNIT_HIGHLIGHT" val="0"/>
+  <p:tag name="KSO_WM_UNIT_COMPATIBLE" val="0"/>
+  <p:tag name="KSO_WM_UNIT_DIAGRAM_ISNUMVISUAL" val="0"/>
+  <p:tag name="KSO_WM_UNIT_DIAGRAM_ISREFERUNIT" val="0"/>
+  <p:tag name="KSO_WM_UNIT_ID" val="_1**"/>
+  <p:tag name="KSO_WM_UNIT_LAYERLEVEL" val="1"/>
+  <p:tag name="KSO_WM_TAG_VERSION" val="1.0"/>
+  <p:tag name="KSO_WM_BEAUTIFY_FLAG" val="#wm#"/>
 </p:tagLst>
 </file>
 

--- a/src/test/java/com/uc/ppt/file/template.pptx
+++ b/src/test/java/com/uc/ppt/file/template.pptx
@@ -3803,10 +3803,14 @@
           </a:bodyPr>
           <a:p>
             <a:r>
-              <a:rPr lang="en-US" altLang="zh-CN"/>
-              <a:t>${tableData}</a:t>
-            </a:r>
-            <a:endParaRPr lang="en-US" altLang="zh-CN"/>
+              <a:rPr lang="en-US" altLang="zh-CN" sz="1000"/>
+              <a:t>${tableData</a:t>
+            </a:r>
+            <a:r>
+              <a:rPr lang="en-US" altLang="zh-CN" sz="1000"/>
+              <a:t>}</a:t>
+            </a:r>
+            <a:endParaRPr lang="en-US" altLang="zh-CN" sz="1000"/>
           </a:p>
         </p:txBody>
       </p:sp>
